--- a/decks/quran-word-reader-ur.pptx
+++ b/decks/quran-word-reader-ur.pptx
@@ -21,6 +21,7 @@
     <p:sldId id="269" r:id="rId20"/>
     <p:sldId id="270" r:id="rId21"/>
     <p:sldId id="271" r:id="rId22"/>
+    <p:sldId id="272" r:id="rId23"/>
   </p:sldIdLst>
   <p:sldSz cx="12191695" cy="6858000" type="screen4x3"/>
   <p:notesSz cx="6858000" cy="9144000"/>
@@ -5607,8 +5608,8 @@
         </p:nvSpPr>
         <p:spPr>
           <a:xfrm>
-            <a:off x="6659575" y="566928"/>
-            <a:ext cx="4206240" cy="475488"/>
+            <a:off x="7253935" y="566928"/>
+            <a:ext cx="3611880" cy="475488"/>
           </a:xfrm>
           <a:prstGeom prst="rect">
             <a:avLst/>
@@ -5630,7 +5631,7 @@
                 <a:latin typeface="Arial"/>
                 <a:cs typeface="Arial"/>
               </a:rPr>
-              <a:t>ہندی حروف</a:t>
+              <a:t>شانِ نزول</a:t>
             </a:r>
           </a:p>
         </p:txBody>
@@ -5643,8 +5644,8 @@
         </p:nvSpPr>
         <p:spPr>
           <a:xfrm>
-            <a:off x="6613855" y="1207008"/>
-            <a:ext cx="4937760" cy="1051560"/>
+            <a:off x="7208215" y="1207008"/>
+            <a:ext cx="4343400" cy="1051560"/>
           </a:xfrm>
           <a:prstGeom prst="rect">
             <a:avLst/>
@@ -5670,7 +5671,7 @@
                 <a:latin typeface="Arial"/>
                 <a:cs typeface="Arial"/>
               </a:rPr>
-              <a:t>ابھی عربی حروف نہیں آتے؟ پھر بھی شروع کریں۔</a:t>
+              <a:t>آیت کے پیچھے کا واقعہ</a:t>
             </a:r>
           </a:p>
         </p:txBody>
@@ -5683,8 +5684,8 @@
         </p:nvSpPr>
         <p:spPr>
           <a:xfrm>
-            <a:off x="6613855" y="2514600"/>
-            <a:ext cx="4937760" cy="3749039"/>
+            <a:off x="7208215" y="2514600"/>
+            <a:ext cx="4343400" cy="3749039"/>
           </a:xfrm>
           <a:prstGeom prst="rect">
             <a:avLst/>
@@ -5706,6 +5707,16 @@
               </a:spcAft>
             </a:pPr>
             <a:r>
+              <a:rPr sz="1800" b="1" lang="en-US">
+                <a:solidFill>
+                  <a:srgbClr val="1F6F62"/>
+                </a:solidFill>
+                <a:latin typeface="Arial"/>
+                <a:cs typeface="Arial"/>
+              </a:rPr>
+              <a:t>📜 Why revealed </a:t>
+            </a:r>
+            <a:r>
               <a:rPr sz="1800" b="1" lang="ur-PK">
                 <a:solidFill>
                   <a:srgbClr val="1F6F62"/>
@@ -5713,7 +5724,7 @@
                 <a:latin typeface="Arial"/>
                 <a:cs typeface="Arial"/>
               </a:rPr>
-              <a:t>ہر لفظ ہندی حروف میں دکھایا جا سکتا ہے، اکیلا یا عربی کے نیچے۔</a:t>
+              <a:t>دبائیں اور پڑھیں کہ آیت کس موقع پر نازل ہوئی۔</a:t>
             </a:r>
           </a:p>
           <a:p>
@@ -5739,27 +5750,7 @@
                 <a:latin typeface="Arial"/>
                 <a:cs typeface="Arial"/>
               </a:rPr>
-              <a:t>ٱلَّذِينَ کو </a:t>
-            </a:r>
-            <a:r>
-              <a:rPr sz="1600" b="0" lang="hi-IN">
-                <a:solidFill>
-                  <a:srgbClr val="15302E"/>
-                </a:solidFill>
-                <a:latin typeface="Arial"/>
-                <a:cs typeface="Nirmala UI"/>
-              </a:rPr>
-              <a:t>अल्लज़ी-न </a:t>
-            </a:r>
-            <a:r>
-              <a:rPr sz="1600" b="0" lang="ur-PK">
-                <a:solidFill>
-                  <a:srgbClr val="15302E"/>
-                </a:solidFill>
-                <a:latin typeface="Arial"/>
-                <a:cs typeface="Arial"/>
-              </a:rPr>
-              <a:t>لکھا جاتا ہے۔ "-" اس زبر کو ظاہر کرتا ہے جو پڑھا جاتا ہے۔</a:t>
+              <a:t>صرف صحیح روایات، امام سیوطیؒ کی لباب النقول سے۔</a:t>
             </a:r>
           </a:p>
           <a:p>
@@ -5785,17 +5776,7 @@
                 <a:latin typeface="Arial"/>
                 <a:cs typeface="Arial"/>
               </a:rPr>
-              <a:t>آیت کا آخری لفظ وقف کے ساتھ لکھا جاتا ہے: </a:t>
-            </a:r>
-            <a:r>
-              <a:rPr sz="1600" b="0" lang="hi-IN">
-                <a:solidFill>
-                  <a:srgbClr val="15302E"/>
-                </a:solidFill>
-                <a:latin typeface="Arial"/>
-                <a:cs typeface="Nirmala UI"/>
-              </a:rPr>
-              <a:t>लिल्मुत्तक़ीन</a:t>
+              <a:t>ہر روایت کا درجہ ساتھ لکھا ہے، جیسے صحیح: بخاری و مسلم۔</a:t>
             </a:r>
           </a:p>
           <a:p>
@@ -5821,7 +5802,7 @@
                 <a:latin typeface="Arial"/>
                 <a:cs typeface="Arial"/>
               </a:rPr>
-              <a:t>کوئز بھی ہندی حروف میں آ جاتے ہیں۔</a:t>
+              <a:t>اردو، انگریزی یا ہندی میں پڑھیں۔ عربی متن ایک ٹیپ پر۔</a:t>
             </a:r>
           </a:p>
         </p:txBody>
@@ -5834,8 +5815,8 @@
         </p:nvSpPr>
         <p:spPr>
           <a:xfrm>
-            <a:off x="3450031" y="621792"/>
-            <a:ext cx="2651760" cy="5038344"/>
+            <a:off x="4775911" y="941832"/>
+            <a:ext cx="2103120" cy="4163099"/>
           </a:xfrm>
           <a:prstGeom prst="roundRect">
             <a:avLst>
@@ -5874,7 +5855,7 @@
       </p:sp>
       <p:pic>
         <p:nvPicPr>
-          <p:cNvPr id="7" name="Screenshot hindi" descr="hindi"/>
+          <p:cNvPr id="7" name="Screenshot why" descr="why"/>
           <p:cNvPicPr>
             <a:picLocks noChangeAspect="1"/>
           </p:cNvPicPr>
@@ -5888,8 +5869,8 @@
         </p:blipFill>
         <p:spPr>
           <a:xfrm>
-            <a:off x="3504895" y="548640"/>
-            <a:ext cx="2651760" cy="5038344"/>
+            <a:off x="4830775" y="868680"/>
+            <a:ext cx="2103120" cy="4163099"/>
           </a:xfrm>
           <a:prstGeom prst="roundRect">
             <a:avLst>
@@ -5911,8 +5892,8 @@
         </p:nvSpPr>
         <p:spPr>
           <a:xfrm>
-            <a:off x="523951" y="1033272"/>
-            <a:ext cx="2651760" cy="5038344"/>
+            <a:off x="2553919" y="576072"/>
+            <a:ext cx="2103120" cy="4163099"/>
           </a:xfrm>
           <a:prstGeom prst="roundRect">
             <a:avLst>
@@ -5951,7 +5932,7 @@
       </p:sp>
       <p:pic>
         <p:nvPicPr>
-          <p:cNvPr id="9" name="Screenshot hquiz" descr="hquiz"/>
+          <p:cNvPr id="9" name="Screenshot whypanel" descr="whypanel"/>
           <p:cNvPicPr>
             <a:picLocks noChangeAspect="1"/>
           </p:cNvPicPr>
@@ -5965,8 +5946,8 @@
         </p:blipFill>
         <p:spPr>
           <a:xfrm>
-            <a:off x="578815" y="960120"/>
-            <a:ext cx="2651760" cy="5038344"/>
+            <a:off x="2608783" y="502920"/>
+            <a:ext cx="2103120" cy="4163099"/>
           </a:xfrm>
           <a:prstGeom prst="roundRect">
             <a:avLst>
@@ -5982,7 +5963,84 @@
       </p:pic>
       <p:sp>
         <p:nvSpPr>
-          <p:cNvPr id="10" name="Footer"/>
+          <p:cNvPr id="10" name="Phone shadow"/>
+          <p:cNvSpPr/>
+          <p:nvPr/>
+        </p:nvSpPr>
+        <p:spPr>
+          <a:xfrm>
+            <a:off x="331927" y="1307592"/>
+            <a:ext cx="2103120" cy="4163099"/>
+          </a:xfrm>
+          <a:prstGeom prst="roundRect">
+            <a:avLst>
+              <a:gd name="adj" fmla="val 6000"/>
+            </a:avLst>
+          </a:prstGeom>
+          <a:solidFill>
+            <a:srgbClr val="C9D3D0"/>
+          </a:solidFill>
+          <a:ln>
+            <a:noFill/>
+          </a:ln>
+          <a:effectLst/>
+        </p:spPr>
+        <p:style>
+          <a:lnRef idx="1">
+            <a:schemeClr val="accent1"/>
+          </a:lnRef>
+          <a:fillRef idx="3">
+            <a:schemeClr val="accent1"/>
+          </a:fillRef>
+          <a:effectRef idx="2">
+            <a:schemeClr val="accent1"/>
+          </a:effectRef>
+          <a:fontRef idx="minor">
+            <a:schemeClr val="lt1"/>
+          </a:fontRef>
+        </p:style>
+        <p:txBody>
+          <a:bodyPr rtlCol="0" anchor="ctr"/>
+          <a:lstStyle/>
+          <a:p>
+            <a:pPr algn="ctr"/>
+          </a:p>
+        </p:txBody>
+      </p:sp>
+      <p:pic>
+        <p:nvPicPr>
+          <p:cNvPr id="11" name="Screenshot whyar" descr="whyar"/>
+          <p:cNvPicPr>
+            <a:picLocks noChangeAspect="1"/>
+          </p:cNvPicPr>
+          <p:nvPr/>
+        </p:nvPicPr>
+        <p:blipFill>
+          <a:blip r:embed="rId4"/>
+          <a:stretch>
+            <a:fillRect/>
+          </a:stretch>
+        </p:blipFill>
+        <p:spPr>
+          <a:xfrm>
+            <a:off x="386791" y="1234440"/>
+            <a:ext cx="2103120" cy="4163099"/>
+          </a:xfrm>
+          <a:prstGeom prst="roundRect">
+            <a:avLst>
+              <a:gd name="adj" fmla="val 6000"/>
+            </a:avLst>
+          </a:prstGeom>
+          <a:ln w="28575">
+            <a:solidFill>
+              <a:srgbClr val="15302E"/>
+            </a:solidFill>
+          </a:ln>
+        </p:spPr>
+      </p:pic>
+      <p:sp>
+        <p:nvSpPr>
+          <p:cNvPr id="12" name="Footer"/>
           <p:cNvSpPr txBox="1"/>
           <p:nvPr/>
         </p:nvSpPr>
@@ -6028,7 +6086,7 @@
       </p:sp>
       <p:sp>
         <p:nvSpPr>
-          <p:cNvPr id="11" name="Slide number"/>
+          <p:cNvPr id="13" name="Slide number"/>
           <p:cNvSpPr txBox="1"/>
           <p:nvPr/>
         </p:nvSpPr>
@@ -6150,8 +6208,8 @@
         </p:nvSpPr>
         <p:spPr>
           <a:xfrm>
-            <a:off x="7116775" y="566928"/>
-            <a:ext cx="3749040" cy="475488"/>
+            <a:off x="6659575" y="566928"/>
+            <a:ext cx="4206240" cy="475488"/>
           </a:xfrm>
           <a:prstGeom prst="rect">
             <a:avLst/>
@@ -6173,7 +6231,7 @@
                 <a:latin typeface="Arial"/>
                 <a:cs typeface="Arial"/>
               </a:rPr>
-              <a:t>ہر جگہ</a:t>
+              <a:t>ہندی حروف</a:t>
             </a:r>
           </a:p>
         </p:txBody>
@@ -6186,8 +6244,8 @@
         </p:nvSpPr>
         <p:spPr>
           <a:xfrm>
-            <a:off x="7071055" y="1207008"/>
-            <a:ext cx="4480560" cy="1051560"/>
+            <a:off x="6613855" y="1207008"/>
+            <a:ext cx="4937760" cy="1051560"/>
           </a:xfrm>
           <a:prstGeom prst="rect">
             <a:avLst/>
@@ -6213,7 +6271,7 @@
                 <a:latin typeface="Arial"/>
                 <a:cs typeface="Arial"/>
               </a:rPr>
-              <a:t>فون، ٹیبلٹ یا کمپیوٹر پر</a:t>
+              <a:t>ابھی عربی حروف نہیں آتے؟ پھر بھی شروع کریں۔</a:t>
             </a:r>
           </a:p>
         </p:txBody>
@@ -6226,8 +6284,8 @@
         </p:nvSpPr>
         <p:spPr>
           <a:xfrm>
-            <a:off x="7071055" y="2514600"/>
-            <a:ext cx="4480560" cy="3749039"/>
+            <a:off x="6613855" y="2514600"/>
+            <a:ext cx="4937760" cy="3749039"/>
           </a:xfrm>
           <a:prstGeom prst="rect">
             <a:avLst/>
@@ -6256,7 +6314,7 @@
                 <a:latin typeface="Arial"/>
                 <a:cs typeface="Arial"/>
               </a:rPr>
-              <a:t>ایک بار انسٹال کریں اور کہیں بھی پڑھیں، انٹرنیٹ کے بغیر بھی۔</a:t>
+              <a:t>ہر لفظ ہندی حروف میں دکھایا جا سکتا ہے، اکیلا یا عربی کے نیچے۔</a:t>
             </a:r>
           </a:p>
           <a:p>
@@ -6282,7 +6340,27 @@
                 <a:latin typeface="Arial"/>
                 <a:cs typeface="Arial"/>
               </a:rPr>
-              <a:t>پہلی بار کے بعد آف لائن چلتی ہے۔</a:t>
+              <a:t>ٱلَّذِينَ کو </a:t>
+            </a:r>
+            <a:r>
+              <a:rPr sz="1600" b="0" lang="hi-IN">
+                <a:solidFill>
+                  <a:srgbClr val="15302E"/>
+                </a:solidFill>
+                <a:latin typeface="Arial"/>
+                <a:cs typeface="Nirmala UI"/>
+              </a:rPr>
+              <a:t>अल्लज़ी-न </a:t>
+            </a:r>
+            <a:r>
+              <a:rPr sz="1600" b="0" lang="ur-PK">
+                <a:solidFill>
+                  <a:srgbClr val="15302E"/>
+                </a:solidFill>
+                <a:latin typeface="Arial"/>
+                <a:cs typeface="Arial"/>
+              </a:rPr>
+              <a:t>لکھا جاتا ہے۔ "-" اس زبر کو ظاہر کرتا ہے جو پڑھا جاتا ہے۔</a:t>
             </a:r>
           </a:p>
           <a:p>
@@ -6308,7 +6386,17 @@
                 <a:latin typeface="Arial"/>
                 <a:cs typeface="Arial"/>
               </a:rPr>
-              <a:t>روشن یا تاریک انداز، فون کی سیٹنگ جو بھی ہو۔</a:t>
+              <a:t>آیت کا آخری لفظ وقف کے ساتھ لکھا جاتا ہے: </a:t>
+            </a:r>
+            <a:r>
+              <a:rPr sz="1600" b="0" lang="hi-IN">
+                <a:solidFill>
+                  <a:srgbClr val="15302E"/>
+                </a:solidFill>
+                <a:latin typeface="Arial"/>
+                <a:cs typeface="Nirmala UI"/>
+              </a:rPr>
+              <a:t>लिल्मुत्तक़ीन</a:t>
             </a:r>
           </a:p>
           <a:p>
@@ -6334,25 +6422,25 @@
                 <a:latin typeface="Arial"/>
                 <a:cs typeface="Arial"/>
               </a:rPr>
-              <a:t>کمپیوٹر پر ورڈ کارڈ صفحے کے ساتھ کھلتا ہے۔</a:t>
-            </a:r>
-          </a:p>
-        </p:txBody>
-      </p:sp>
-      <p:sp>
-        <p:nvSpPr>
-          <p:cNvPr id="6" name="Window shadow"/>
+              <a:t>کوئز بھی ہندی حروف میں آ جاتے ہیں۔</a:t>
+            </a:r>
+          </a:p>
+        </p:txBody>
+      </p:sp>
+      <p:sp>
+        <p:nvSpPr>
+          <p:cNvPr id="6" name="Phone shadow"/>
           <p:cNvSpPr/>
           <p:nvPr/>
         </p:nvSpPr>
         <p:spPr>
           <a:xfrm>
-            <a:off x="1566367" y="996696"/>
-            <a:ext cx="5120640" cy="3295903"/>
+            <a:off x="3450031" y="621792"/>
+            <a:ext cx="2651760" cy="5038344"/>
           </a:xfrm>
           <a:prstGeom prst="roundRect">
             <a:avLst>
-              <a:gd name="adj" fmla="val 3000"/>
+              <a:gd name="adj" fmla="val 6000"/>
             </a:avLst>
           </a:prstGeom>
           <a:solidFill>
@@ -6385,187 +6473,9 @@
           </a:p>
         </p:txBody>
       </p:sp>
-      <p:sp>
-        <p:nvSpPr>
-          <p:cNvPr id="7" name="Window frame"/>
-          <p:cNvSpPr/>
-          <p:nvPr/>
-        </p:nvSpPr>
-        <p:spPr>
-          <a:xfrm>
-            <a:off x="1630375" y="914400"/>
-            <a:ext cx="5120640" cy="3295903"/>
-          </a:xfrm>
-          <a:prstGeom prst="roundRect">
-            <a:avLst>
-              <a:gd name="adj" fmla="val 3000"/>
-            </a:avLst>
-          </a:prstGeom>
-          <a:solidFill>
-            <a:srgbClr val="15302E"/>
-          </a:solidFill>
-          <a:ln>
-            <a:noFill/>
-          </a:ln>
-          <a:effectLst/>
-        </p:spPr>
-        <p:style>
-          <a:lnRef idx="1">
-            <a:schemeClr val="accent1"/>
-          </a:lnRef>
-          <a:fillRef idx="3">
-            <a:schemeClr val="accent1"/>
-          </a:fillRef>
-          <a:effectRef idx="2">
-            <a:schemeClr val="accent1"/>
-          </a:effectRef>
-          <a:fontRef idx="minor">
-            <a:schemeClr val="lt1"/>
-          </a:fontRef>
-        </p:style>
-        <p:txBody>
-          <a:bodyPr rtlCol="0" anchor="ctr"/>
-          <a:lstStyle/>
-          <a:p>
-            <a:pPr algn="ctr"/>
-          </a:p>
-        </p:txBody>
-      </p:sp>
-      <p:sp>
-        <p:nvSpPr>
-          <p:cNvPr id="8" name="Window dot"/>
-          <p:cNvSpPr/>
-          <p:nvPr/>
-        </p:nvSpPr>
-        <p:spPr>
-          <a:xfrm>
-            <a:off x="6531559" y="987552"/>
-            <a:ext cx="91440" cy="91440"/>
-          </a:xfrm>
-          <a:prstGeom prst="ellipse">
-            <a:avLst/>
-          </a:prstGeom>
-          <a:solidFill>
-            <a:srgbClr val="EF8A8A"/>
-          </a:solidFill>
-          <a:ln>
-            <a:noFill/>
-          </a:ln>
-          <a:effectLst/>
-        </p:spPr>
-        <p:style>
-          <a:lnRef idx="1">
-            <a:schemeClr val="accent1"/>
-          </a:lnRef>
-          <a:fillRef idx="3">
-            <a:schemeClr val="accent1"/>
-          </a:fillRef>
-          <a:effectRef idx="2">
-            <a:schemeClr val="accent1"/>
-          </a:effectRef>
-          <a:fontRef idx="minor">
-            <a:schemeClr val="lt1"/>
-          </a:fontRef>
-        </p:style>
-        <p:txBody>
-          <a:bodyPr rtlCol="0" anchor="ctr"/>
-          <a:lstStyle/>
-          <a:p>
-            <a:pPr algn="ctr"/>
-          </a:p>
-        </p:txBody>
-      </p:sp>
-      <p:sp>
-        <p:nvSpPr>
-          <p:cNvPr id="9" name="Window dot"/>
-          <p:cNvSpPr/>
-          <p:nvPr/>
-        </p:nvSpPr>
-        <p:spPr>
-          <a:xfrm>
-            <a:off x="6366967" y="987552"/>
-            <a:ext cx="91440" cy="91440"/>
-          </a:xfrm>
-          <a:prstGeom prst="ellipse">
-            <a:avLst/>
-          </a:prstGeom>
-          <a:solidFill>
-            <a:srgbClr val="E9A227"/>
-          </a:solidFill>
-          <a:ln>
-            <a:noFill/>
-          </a:ln>
-          <a:effectLst/>
-        </p:spPr>
-        <p:style>
-          <a:lnRef idx="1">
-            <a:schemeClr val="accent1"/>
-          </a:lnRef>
-          <a:fillRef idx="3">
-            <a:schemeClr val="accent1"/>
-          </a:fillRef>
-          <a:effectRef idx="2">
-            <a:schemeClr val="accent1"/>
-          </a:effectRef>
-          <a:fontRef idx="minor">
-            <a:schemeClr val="lt1"/>
-          </a:fontRef>
-        </p:style>
-        <p:txBody>
-          <a:bodyPr rtlCol="0" anchor="ctr"/>
-          <a:lstStyle/>
-          <a:p>
-            <a:pPr algn="ctr"/>
-          </a:p>
-        </p:txBody>
-      </p:sp>
-      <p:sp>
-        <p:nvSpPr>
-          <p:cNvPr id="10" name="Window dot"/>
-          <p:cNvSpPr/>
-          <p:nvPr/>
-        </p:nvSpPr>
-        <p:spPr>
-          <a:xfrm>
-            <a:off x="6202375" y="987552"/>
-            <a:ext cx="91440" cy="91440"/>
-          </a:xfrm>
-          <a:prstGeom prst="ellipse">
-            <a:avLst/>
-          </a:prstGeom>
-          <a:solidFill>
-            <a:srgbClr val="6CC38F"/>
-          </a:solidFill>
-          <a:ln>
-            <a:noFill/>
-          </a:ln>
-          <a:effectLst/>
-        </p:spPr>
-        <p:style>
-          <a:lnRef idx="1">
-            <a:schemeClr val="accent1"/>
-          </a:lnRef>
-          <a:fillRef idx="3">
-            <a:schemeClr val="accent1"/>
-          </a:fillRef>
-          <a:effectRef idx="2">
-            <a:schemeClr val="accent1"/>
-          </a:effectRef>
-          <a:fontRef idx="minor">
-            <a:schemeClr val="lt1"/>
-          </a:fontRef>
-        </p:style>
-        <p:txBody>
-          <a:bodyPr rtlCol="0" anchor="ctr"/>
-          <a:lstStyle/>
-          <a:p>
-            <a:pPr algn="ctr"/>
-          </a:p>
-        </p:txBody>
-      </p:sp>
       <p:pic>
         <p:nvPicPr>
-          <p:cNvPr id="11" name="Screenshot desk" descr="desk"/>
+          <p:cNvPr id="7" name="Screenshot hindi" descr="hindi"/>
           <p:cNvPicPr>
             <a:picLocks noChangeAspect="1"/>
           </p:cNvPicPr>
@@ -6579,24 +6489,31 @@
         </p:blipFill>
         <p:spPr>
           <a:xfrm>
-            <a:off x="1657807" y="1152144"/>
-            <a:ext cx="5065776" cy="3021583"/>
-          </a:xfrm>
-          <a:prstGeom prst="rect">
-            <a:avLst/>
-          </a:prstGeom>
+            <a:off x="3504895" y="548640"/>
+            <a:ext cx="2651760" cy="5038344"/>
+          </a:xfrm>
+          <a:prstGeom prst="roundRect">
+            <a:avLst>
+              <a:gd name="adj" fmla="val 6000"/>
+            </a:avLst>
+          </a:prstGeom>
+          <a:ln w="28575">
+            <a:solidFill>
+              <a:srgbClr val="15302E"/>
+            </a:solidFill>
+          </a:ln>
         </p:spPr>
       </p:pic>
       <p:sp>
         <p:nvSpPr>
-          <p:cNvPr id="12" name="Phone shadow"/>
+          <p:cNvPr id="8" name="Phone shadow"/>
           <p:cNvSpPr/>
           <p:nvPr/>
         </p:nvSpPr>
         <p:spPr>
           <a:xfrm>
-            <a:off x="569671" y="2221992"/>
-            <a:ext cx="1920240" cy="3801090"/>
+            <a:off x="523951" y="1033272"/>
+            <a:ext cx="2651760" cy="5038344"/>
           </a:xfrm>
           <a:prstGeom prst="roundRect">
             <a:avLst>
@@ -6635,7 +6552,7 @@
       </p:sp>
       <p:pic>
         <p:nvPicPr>
-          <p:cNvPr id="13" name="Screenshot dark" descr="dark"/>
+          <p:cNvPr id="9" name="Screenshot hquiz" descr="hquiz"/>
           <p:cNvPicPr>
             <a:picLocks noChangeAspect="1"/>
           </p:cNvPicPr>
@@ -6649,8 +6566,8 @@
         </p:blipFill>
         <p:spPr>
           <a:xfrm>
-            <a:off x="624535" y="2148840"/>
-            <a:ext cx="1920240" cy="3801090"/>
+            <a:off x="578815" y="960120"/>
+            <a:ext cx="2651760" cy="5038344"/>
           </a:xfrm>
           <a:prstGeom prst="roundRect">
             <a:avLst>
@@ -6666,7 +6583,7 @@
       </p:pic>
       <p:sp>
         <p:nvSpPr>
-          <p:cNvPr id="14" name="Footer"/>
+          <p:cNvPr id="10" name="Footer"/>
           <p:cNvSpPr txBox="1"/>
           <p:nvPr/>
         </p:nvSpPr>
@@ -6712,7 +6629,7 @@
       </p:sp>
       <p:sp>
         <p:nvSpPr>
-          <p:cNvPr id="15" name="Slide number"/>
+          <p:cNvPr id="11" name="Slide number"/>
           <p:cNvSpPr txBox="1"/>
           <p:nvPr/>
         </p:nvSpPr>
@@ -6834,6 +6751,690 @@
         </p:nvSpPr>
         <p:spPr>
           <a:xfrm>
+            <a:off x="7116775" y="566928"/>
+            <a:ext cx="3749040" cy="475488"/>
+          </a:xfrm>
+          <a:prstGeom prst="rect">
+            <a:avLst/>
+          </a:prstGeom>
+          <a:noFill/>
+        </p:spPr>
+        <p:txBody>
+          <a:bodyPr wrap="square" anchor="ctr" lIns="0" rIns="0" tIns="0" bIns="0">
+            <a:spAutoFit/>
+          </a:bodyPr>
+          <a:lstStyle/>
+          <a:p>
+            <a:pPr algn="r" rtl="1"/>
+            <a:r>
+              <a:rPr sz="1300" b="1" lang="ur-PK">
+                <a:solidFill>
+                  <a:srgbClr val="B8740F"/>
+                </a:solidFill>
+                <a:latin typeface="Arial"/>
+                <a:cs typeface="Arial"/>
+              </a:rPr>
+              <a:t>ہر جگہ</a:t>
+            </a:r>
+          </a:p>
+        </p:txBody>
+      </p:sp>
+      <p:sp>
+        <p:nvSpPr>
+          <p:cNvPr id="4" name="Title"/>
+          <p:cNvSpPr txBox="1"/>
+          <p:nvPr/>
+        </p:nvSpPr>
+        <p:spPr>
+          <a:xfrm>
+            <a:off x="7071055" y="1207008"/>
+            <a:ext cx="4480560" cy="1051560"/>
+          </a:xfrm>
+          <a:prstGeom prst="rect">
+            <a:avLst/>
+          </a:prstGeom>
+          <a:noFill/>
+        </p:spPr>
+        <p:txBody>
+          <a:bodyPr wrap="square" anchor="t" lIns="0" rIns="0" tIns="0" bIns="0">
+            <a:spAutoFit/>
+          </a:bodyPr>
+          <a:lstStyle/>
+          <a:p>
+            <a:pPr algn="r" rtl="1">
+              <a:lnSpc>
+                <a:spcPct val="95000"/>
+              </a:lnSpc>
+            </a:pPr>
+            <a:r>
+              <a:rPr sz="3200" b="1" lang="ur-PK">
+                <a:solidFill>
+                  <a:srgbClr val="15302E"/>
+                </a:solidFill>
+                <a:latin typeface="Arial"/>
+                <a:cs typeface="Arial"/>
+              </a:rPr>
+              <a:t>فون، ٹیبلٹ یا کمپیوٹر پر</a:t>
+            </a:r>
+          </a:p>
+        </p:txBody>
+      </p:sp>
+      <p:sp>
+        <p:nvSpPr>
+          <p:cNvPr id="5" name="Points"/>
+          <p:cNvSpPr txBox="1"/>
+          <p:nvPr/>
+        </p:nvSpPr>
+        <p:spPr>
+          <a:xfrm>
+            <a:off x="7071055" y="2514600"/>
+            <a:ext cx="4480560" cy="3749039"/>
+          </a:xfrm>
+          <a:prstGeom prst="rect">
+            <a:avLst/>
+          </a:prstGeom>
+          <a:noFill/>
+        </p:spPr>
+        <p:txBody>
+          <a:bodyPr wrap="square" anchor="t" lIns="0" rIns="0" tIns="0" bIns="0">
+            <a:spAutoFit/>
+          </a:bodyPr>
+          <a:lstStyle/>
+          <a:p>
+            <a:pPr algn="r" rtl="1">
+              <a:lnSpc>
+                <a:spcPct val="105000"/>
+              </a:lnSpc>
+              <a:spcAft>
+                <a:spcPts val="1400"/>
+              </a:spcAft>
+            </a:pPr>
+            <a:r>
+              <a:rPr sz="1800" b="1" lang="ur-PK">
+                <a:solidFill>
+                  <a:srgbClr val="1F6F62"/>
+                </a:solidFill>
+                <a:latin typeface="Arial"/>
+                <a:cs typeface="Arial"/>
+              </a:rPr>
+              <a:t>ایک بار انسٹال کریں اور کہیں بھی پڑھیں، انٹرنیٹ کے بغیر بھی۔</a:t>
+            </a:r>
+          </a:p>
+          <a:p>
+            <a:pPr algn="r" rtl="1" marL="292608" indent="-292608">
+              <a:lnSpc>
+                <a:spcPct val="105000"/>
+              </a:lnSpc>
+              <a:spcAft>
+                <a:spcPts val="900"/>
+              </a:spcAft>
+              <a:buClr>
+                <a:srgbClr val="E9A227"/>
+              </a:buClr>
+              <a:buSzPct val="110000"/>
+              <a:buFont typeface="Arial"/>
+              <a:buChar char="•"/>
+            </a:pPr>
+            <a:r>
+              <a:rPr sz="1600" b="0" lang="ur-PK">
+                <a:solidFill>
+                  <a:srgbClr val="15302E"/>
+                </a:solidFill>
+                <a:latin typeface="Arial"/>
+                <a:cs typeface="Arial"/>
+              </a:rPr>
+              <a:t>پہلی بار کے بعد آف لائن چلتی ہے۔</a:t>
+            </a:r>
+          </a:p>
+          <a:p>
+            <a:pPr algn="r" rtl="1" marL="292608" indent="-292608">
+              <a:lnSpc>
+                <a:spcPct val="105000"/>
+              </a:lnSpc>
+              <a:spcAft>
+                <a:spcPts val="900"/>
+              </a:spcAft>
+              <a:buClr>
+                <a:srgbClr val="E9A227"/>
+              </a:buClr>
+              <a:buSzPct val="110000"/>
+              <a:buFont typeface="Arial"/>
+              <a:buChar char="•"/>
+            </a:pPr>
+            <a:r>
+              <a:rPr sz="1600" b="0" lang="ur-PK">
+                <a:solidFill>
+                  <a:srgbClr val="15302E"/>
+                </a:solidFill>
+                <a:latin typeface="Arial"/>
+                <a:cs typeface="Arial"/>
+              </a:rPr>
+              <a:t>روشن یا تاریک انداز، فون کی سیٹنگ جو بھی ہو۔</a:t>
+            </a:r>
+          </a:p>
+          <a:p>
+            <a:pPr algn="r" rtl="1" marL="292608" indent="-292608">
+              <a:lnSpc>
+                <a:spcPct val="105000"/>
+              </a:lnSpc>
+              <a:spcAft>
+                <a:spcPts val="900"/>
+              </a:spcAft>
+              <a:buClr>
+                <a:srgbClr val="E9A227"/>
+              </a:buClr>
+              <a:buSzPct val="110000"/>
+              <a:buFont typeface="Arial"/>
+              <a:buChar char="•"/>
+            </a:pPr>
+            <a:r>
+              <a:rPr sz="1600" b="0" lang="ur-PK">
+                <a:solidFill>
+                  <a:srgbClr val="15302E"/>
+                </a:solidFill>
+                <a:latin typeface="Arial"/>
+                <a:cs typeface="Arial"/>
+              </a:rPr>
+              <a:t>کمپیوٹر پر ورڈ کارڈ صفحے کے ساتھ کھلتا ہے۔</a:t>
+            </a:r>
+          </a:p>
+        </p:txBody>
+      </p:sp>
+      <p:sp>
+        <p:nvSpPr>
+          <p:cNvPr id="6" name="Window shadow"/>
+          <p:cNvSpPr/>
+          <p:nvPr/>
+        </p:nvSpPr>
+        <p:spPr>
+          <a:xfrm>
+            <a:off x="1566367" y="996696"/>
+            <a:ext cx="5120640" cy="3295903"/>
+          </a:xfrm>
+          <a:prstGeom prst="roundRect">
+            <a:avLst>
+              <a:gd name="adj" fmla="val 3000"/>
+            </a:avLst>
+          </a:prstGeom>
+          <a:solidFill>
+            <a:srgbClr val="C9D3D0"/>
+          </a:solidFill>
+          <a:ln>
+            <a:noFill/>
+          </a:ln>
+          <a:effectLst/>
+        </p:spPr>
+        <p:style>
+          <a:lnRef idx="1">
+            <a:schemeClr val="accent1"/>
+          </a:lnRef>
+          <a:fillRef idx="3">
+            <a:schemeClr val="accent1"/>
+          </a:fillRef>
+          <a:effectRef idx="2">
+            <a:schemeClr val="accent1"/>
+          </a:effectRef>
+          <a:fontRef idx="minor">
+            <a:schemeClr val="lt1"/>
+          </a:fontRef>
+        </p:style>
+        <p:txBody>
+          <a:bodyPr rtlCol="0" anchor="ctr"/>
+          <a:lstStyle/>
+          <a:p>
+            <a:pPr algn="ctr"/>
+          </a:p>
+        </p:txBody>
+      </p:sp>
+      <p:sp>
+        <p:nvSpPr>
+          <p:cNvPr id="7" name="Window frame"/>
+          <p:cNvSpPr/>
+          <p:nvPr/>
+        </p:nvSpPr>
+        <p:spPr>
+          <a:xfrm>
+            <a:off x="1630375" y="914400"/>
+            <a:ext cx="5120640" cy="3295903"/>
+          </a:xfrm>
+          <a:prstGeom prst="roundRect">
+            <a:avLst>
+              <a:gd name="adj" fmla="val 3000"/>
+            </a:avLst>
+          </a:prstGeom>
+          <a:solidFill>
+            <a:srgbClr val="15302E"/>
+          </a:solidFill>
+          <a:ln>
+            <a:noFill/>
+          </a:ln>
+          <a:effectLst/>
+        </p:spPr>
+        <p:style>
+          <a:lnRef idx="1">
+            <a:schemeClr val="accent1"/>
+          </a:lnRef>
+          <a:fillRef idx="3">
+            <a:schemeClr val="accent1"/>
+          </a:fillRef>
+          <a:effectRef idx="2">
+            <a:schemeClr val="accent1"/>
+          </a:effectRef>
+          <a:fontRef idx="minor">
+            <a:schemeClr val="lt1"/>
+          </a:fontRef>
+        </p:style>
+        <p:txBody>
+          <a:bodyPr rtlCol="0" anchor="ctr"/>
+          <a:lstStyle/>
+          <a:p>
+            <a:pPr algn="ctr"/>
+          </a:p>
+        </p:txBody>
+      </p:sp>
+      <p:sp>
+        <p:nvSpPr>
+          <p:cNvPr id="8" name="Window dot"/>
+          <p:cNvSpPr/>
+          <p:nvPr/>
+        </p:nvSpPr>
+        <p:spPr>
+          <a:xfrm>
+            <a:off x="6531559" y="987552"/>
+            <a:ext cx="91440" cy="91440"/>
+          </a:xfrm>
+          <a:prstGeom prst="ellipse">
+            <a:avLst/>
+          </a:prstGeom>
+          <a:solidFill>
+            <a:srgbClr val="EF8A8A"/>
+          </a:solidFill>
+          <a:ln>
+            <a:noFill/>
+          </a:ln>
+          <a:effectLst/>
+        </p:spPr>
+        <p:style>
+          <a:lnRef idx="1">
+            <a:schemeClr val="accent1"/>
+          </a:lnRef>
+          <a:fillRef idx="3">
+            <a:schemeClr val="accent1"/>
+          </a:fillRef>
+          <a:effectRef idx="2">
+            <a:schemeClr val="accent1"/>
+          </a:effectRef>
+          <a:fontRef idx="minor">
+            <a:schemeClr val="lt1"/>
+          </a:fontRef>
+        </p:style>
+        <p:txBody>
+          <a:bodyPr rtlCol="0" anchor="ctr"/>
+          <a:lstStyle/>
+          <a:p>
+            <a:pPr algn="ctr"/>
+          </a:p>
+        </p:txBody>
+      </p:sp>
+      <p:sp>
+        <p:nvSpPr>
+          <p:cNvPr id="9" name="Window dot"/>
+          <p:cNvSpPr/>
+          <p:nvPr/>
+        </p:nvSpPr>
+        <p:spPr>
+          <a:xfrm>
+            <a:off x="6366967" y="987552"/>
+            <a:ext cx="91440" cy="91440"/>
+          </a:xfrm>
+          <a:prstGeom prst="ellipse">
+            <a:avLst/>
+          </a:prstGeom>
+          <a:solidFill>
+            <a:srgbClr val="E9A227"/>
+          </a:solidFill>
+          <a:ln>
+            <a:noFill/>
+          </a:ln>
+          <a:effectLst/>
+        </p:spPr>
+        <p:style>
+          <a:lnRef idx="1">
+            <a:schemeClr val="accent1"/>
+          </a:lnRef>
+          <a:fillRef idx="3">
+            <a:schemeClr val="accent1"/>
+          </a:fillRef>
+          <a:effectRef idx="2">
+            <a:schemeClr val="accent1"/>
+          </a:effectRef>
+          <a:fontRef idx="minor">
+            <a:schemeClr val="lt1"/>
+          </a:fontRef>
+        </p:style>
+        <p:txBody>
+          <a:bodyPr rtlCol="0" anchor="ctr"/>
+          <a:lstStyle/>
+          <a:p>
+            <a:pPr algn="ctr"/>
+          </a:p>
+        </p:txBody>
+      </p:sp>
+      <p:sp>
+        <p:nvSpPr>
+          <p:cNvPr id="10" name="Window dot"/>
+          <p:cNvSpPr/>
+          <p:nvPr/>
+        </p:nvSpPr>
+        <p:spPr>
+          <a:xfrm>
+            <a:off x="6202375" y="987552"/>
+            <a:ext cx="91440" cy="91440"/>
+          </a:xfrm>
+          <a:prstGeom prst="ellipse">
+            <a:avLst/>
+          </a:prstGeom>
+          <a:solidFill>
+            <a:srgbClr val="6CC38F"/>
+          </a:solidFill>
+          <a:ln>
+            <a:noFill/>
+          </a:ln>
+          <a:effectLst/>
+        </p:spPr>
+        <p:style>
+          <a:lnRef idx="1">
+            <a:schemeClr val="accent1"/>
+          </a:lnRef>
+          <a:fillRef idx="3">
+            <a:schemeClr val="accent1"/>
+          </a:fillRef>
+          <a:effectRef idx="2">
+            <a:schemeClr val="accent1"/>
+          </a:effectRef>
+          <a:fontRef idx="minor">
+            <a:schemeClr val="lt1"/>
+          </a:fontRef>
+        </p:style>
+        <p:txBody>
+          <a:bodyPr rtlCol="0" anchor="ctr"/>
+          <a:lstStyle/>
+          <a:p>
+            <a:pPr algn="ctr"/>
+          </a:p>
+        </p:txBody>
+      </p:sp>
+      <p:pic>
+        <p:nvPicPr>
+          <p:cNvPr id="11" name="Screenshot desk" descr="desk"/>
+          <p:cNvPicPr>
+            <a:picLocks noChangeAspect="1"/>
+          </p:cNvPicPr>
+          <p:nvPr/>
+        </p:nvPicPr>
+        <p:blipFill>
+          <a:blip r:embed="rId2"/>
+          <a:stretch>
+            <a:fillRect/>
+          </a:stretch>
+        </p:blipFill>
+        <p:spPr>
+          <a:xfrm>
+            <a:off x="1657807" y="1152144"/>
+            <a:ext cx="5065776" cy="3021583"/>
+          </a:xfrm>
+          <a:prstGeom prst="rect">
+            <a:avLst/>
+          </a:prstGeom>
+        </p:spPr>
+      </p:pic>
+      <p:sp>
+        <p:nvSpPr>
+          <p:cNvPr id="12" name="Phone shadow"/>
+          <p:cNvSpPr/>
+          <p:nvPr/>
+        </p:nvSpPr>
+        <p:spPr>
+          <a:xfrm>
+            <a:off x="569671" y="2221992"/>
+            <a:ext cx="1920240" cy="3801090"/>
+          </a:xfrm>
+          <a:prstGeom prst="roundRect">
+            <a:avLst>
+              <a:gd name="adj" fmla="val 6000"/>
+            </a:avLst>
+          </a:prstGeom>
+          <a:solidFill>
+            <a:srgbClr val="C9D3D0"/>
+          </a:solidFill>
+          <a:ln>
+            <a:noFill/>
+          </a:ln>
+          <a:effectLst/>
+        </p:spPr>
+        <p:style>
+          <a:lnRef idx="1">
+            <a:schemeClr val="accent1"/>
+          </a:lnRef>
+          <a:fillRef idx="3">
+            <a:schemeClr val="accent1"/>
+          </a:fillRef>
+          <a:effectRef idx="2">
+            <a:schemeClr val="accent1"/>
+          </a:effectRef>
+          <a:fontRef idx="minor">
+            <a:schemeClr val="lt1"/>
+          </a:fontRef>
+        </p:style>
+        <p:txBody>
+          <a:bodyPr rtlCol="0" anchor="ctr"/>
+          <a:lstStyle/>
+          <a:p>
+            <a:pPr algn="ctr"/>
+          </a:p>
+        </p:txBody>
+      </p:sp>
+      <p:pic>
+        <p:nvPicPr>
+          <p:cNvPr id="13" name="Screenshot dark" descr="dark"/>
+          <p:cNvPicPr>
+            <a:picLocks noChangeAspect="1"/>
+          </p:cNvPicPr>
+          <p:nvPr/>
+        </p:nvPicPr>
+        <p:blipFill>
+          <a:blip r:embed="rId3"/>
+          <a:stretch>
+            <a:fillRect/>
+          </a:stretch>
+        </p:blipFill>
+        <p:spPr>
+          <a:xfrm>
+            <a:off x="624535" y="2148840"/>
+            <a:ext cx="1920240" cy="3801090"/>
+          </a:xfrm>
+          <a:prstGeom prst="roundRect">
+            <a:avLst>
+              <a:gd name="adj" fmla="val 6000"/>
+            </a:avLst>
+          </a:prstGeom>
+          <a:ln w="28575">
+            <a:solidFill>
+              <a:srgbClr val="15302E"/>
+            </a:solidFill>
+          </a:ln>
+        </p:spPr>
+      </p:pic>
+      <p:sp>
+        <p:nvSpPr>
+          <p:cNvPr id="14" name="Footer"/>
+          <p:cNvSpPr txBox="1"/>
+          <p:nvPr/>
+        </p:nvSpPr>
+        <p:spPr>
+          <a:xfrm>
+            <a:off x="3779215" y="6419088"/>
+            <a:ext cx="7772400" cy="274320"/>
+          </a:xfrm>
+          <a:prstGeom prst="rect">
+            <a:avLst/>
+          </a:prstGeom>
+          <a:noFill/>
+        </p:spPr>
+        <p:txBody>
+          <a:bodyPr wrap="square" anchor="ctr" lIns="0" rIns="0" tIns="0" bIns="0">
+            <a:spAutoFit/>
+          </a:bodyPr>
+          <a:lstStyle/>
+          <a:p>
+            <a:pPr algn="r" rtl="1"/>
+            <a:r>
+              <a:rPr sz="1050" b="0" lang="ur-PK">
+                <a:solidFill>
+                  <a:srgbClr val="5D716E"/>
+                </a:solidFill>
+                <a:latin typeface="Arial"/>
+                <a:cs typeface="Arial"/>
+              </a:rPr>
+              <a:t>مفت · غیر تجارتی · </a:t>
+            </a:r>
+            <a:r>
+              <a:rPr sz="1050" b="0" lang="en-US">
+                <a:solidFill>
+                  <a:srgbClr val="5D716E"/>
+                </a:solidFill>
+                <a:latin typeface="Arial"/>
+                <a:cs typeface="Arial"/>
+              </a:rPr>
+              <a:t>marshadkc.github.io/quranreader</a:t>
+            </a:r>
+          </a:p>
+        </p:txBody>
+      </p:sp>
+      <p:sp>
+        <p:nvSpPr>
+          <p:cNvPr id="15" name="Slide number"/>
+          <p:cNvSpPr txBox="1"/>
+          <p:nvPr/>
+        </p:nvSpPr>
+        <p:spPr>
+          <a:xfrm>
+            <a:off x="640080" y="6419088"/>
+            <a:ext cx="731520" cy="274320"/>
+          </a:xfrm>
+          <a:prstGeom prst="rect">
+            <a:avLst/>
+          </a:prstGeom>
+          <a:noFill/>
+        </p:spPr>
+        <p:txBody>
+          <a:bodyPr wrap="square" anchor="ctr" lIns="0" rIns="0" tIns="0" bIns="0">
+            <a:spAutoFit/>
+          </a:bodyPr>
+          <a:lstStyle/>
+          <a:p>
+            <a:pPr algn="l"/>
+            <a:r>
+              <a:rPr sz="1050" b="0" lang="en-US">
+                <a:solidFill>
+                  <a:srgbClr val="5D716E"/>
+                </a:solidFill>
+                <a:latin typeface="Arial"/>
+                <a:cs typeface="Arial"/>
+              </a:rPr>
+              <a:t>15</a:t>
+            </a:r>
+          </a:p>
+        </p:txBody>
+      </p:sp>
+    </p:spTree>
+  </p:cSld>
+  <p:clrMapOvr>
+    <a:masterClrMapping/>
+  </p:clrMapOvr>
+</p:sld>
+</file>
+
+<file path=ppt/slides/slide16.xml><?xml version="1.0" encoding="utf-8"?>
+<p:sld xmlns:a="http://schemas.openxmlformats.org/drawingml/2006/main" xmlns:p="http://schemas.openxmlformats.org/presentationml/2006/main" xmlns:r="http://schemas.openxmlformats.org/officeDocument/2006/relationships">
+  <p:cSld>
+    <p:bg>
+      <p:bgPr>
+        <a:solidFill>
+          <a:srgbClr val="F3F5F4"/>
+        </a:solidFill>
+        <a:effectLst/>
+      </p:bgPr>
+    </p:bg>
+    <p:spTree>
+      <p:nvGrpSpPr>
+        <p:cNvPr id="1" name=""/>
+        <p:cNvGrpSpPr/>
+        <p:nvPr/>
+      </p:nvGrpSpPr>
+      <p:grpSpPr/>
+      <p:sp>
+        <p:nvSpPr>
+          <p:cNvPr id="2" name="Number badge"/>
+          <p:cNvSpPr/>
+          <p:nvPr/>
+        </p:nvSpPr>
+        <p:spPr>
+          <a:xfrm>
+            <a:off x="11019068" y="566928"/>
+            <a:ext cx="532546" cy="475488"/>
+          </a:xfrm>
+          <a:prstGeom prst="hexagon">
+            <a:avLst/>
+          </a:prstGeom>
+          <a:solidFill>
+            <a:srgbClr val="E9A227"/>
+          </a:solidFill>
+          <a:ln>
+            <a:noFill/>
+          </a:ln>
+          <a:effectLst/>
+        </p:spPr>
+        <p:style>
+          <a:lnRef idx="1">
+            <a:schemeClr val="accent1"/>
+          </a:lnRef>
+          <a:fillRef idx="3">
+            <a:schemeClr val="accent1"/>
+          </a:fillRef>
+          <a:effectRef idx="2">
+            <a:schemeClr val="accent1"/>
+          </a:effectRef>
+          <a:fontRef idx="minor">
+            <a:schemeClr val="lt1"/>
+          </a:fontRef>
+        </p:style>
+        <p:txBody>
+          <a:bodyPr rtlCol="0" anchor="ctr" lIns="0" rIns="0" tIns="0" bIns="0"/>
+          <a:lstStyle/>
+          <a:p>
+            <a:pPr algn="ctr"/>
+            <a:r>
+              <a:rPr sz="1300" b="1" lang="en-US">
+                <a:solidFill>
+                  <a:srgbClr val="FFFFFF"/>
+                </a:solidFill>
+                <a:latin typeface="Arial"/>
+                <a:cs typeface="Arial"/>
+              </a:rPr>
+              <a:t>14</a:t>
+            </a:r>
+          </a:p>
+        </p:txBody>
+      </p:sp>
+      <p:sp>
+        <p:nvSpPr>
+          <p:cNvPr id="3" name="Kicker"/>
+          <p:cNvSpPr txBox="1"/>
+          <p:nvPr/>
+        </p:nvSpPr>
+        <p:spPr>
+          <a:xfrm>
             <a:off x="1081735" y="566928"/>
             <a:ext cx="9784080" cy="475488"/>
           </a:xfrm>
@@ -7987,7 +8588,7 @@
                 <a:latin typeface="Arial"/>
                 <a:cs typeface="Arial"/>
               </a:rPr>
-              <a:t>15</a:t>
+              <a:t>16</a:t>
             </a:r>
           </a:p>
         </p:txBody>
@@ -8000,7 +8601,7 @@
 </p:sld>
 </file>
 
-<file path=ppt/slides/slide16.xml><?xml version="1.0" encoding="utf-8"?>
+<file path=ppt/slides/slide17.xml><?xml version="1.0" encoding="utf-8"?>
 <p:sld xmlns:a="http://schemas.openxmlformats.org/drawingml/2006/main" xmlns:p="http://schemas.openxmlformats.org/presentationml/2006/main" xmlns:r="http://schemas.openxmlformats.org/officeDocument/2006/relationships">
   <p:cSld>
     <p:bg>
@@ -8067,7 +8668,7 @@
                 <a:latin typeface="Arial"/>
                 <a:cs typeface="Arial"/>
               </a:rPr>
-              <a:t>14</a:t>
+              <a:t>15</a:t>
             </a:r>
           </a:p>
         </p:txBody>
@@ -8867,7 +9468,7 @@
                 <a:latin typeface="Arial"/>
                 <a:cs typeface="Arial"/>
               </a:rPr>
-              <a:t>16</a:t>
+              <a:t>17</a:t>
             </a:r>
           </a:p>
         </p:txBody>
